--- a/01_개발자환경구축_김나현_.pptx
+++ b/01_개발자환경구축_김나현_.pptx
@@ -6688,7 +6688,7 @@
         </p:blipFill>
         <p:spPr>
           <a:xfrm>
-            <a:off x="9439320" y="1770759"/>
+            <a:off x="9400031" y="1724536"/>
             <a:ext cx="2676899" cy="866896"/>
           </a:xfrm>
           <a:prstGeom prst="rect">
@@ -6720,6 +6720,36 @@
           <a:xfrm>
             <a:off x="182880" y="2444639"/>
             <a:ext cx="1190791" cy="628738"/>
+          </a:xfrm>
+          <a:prstGeom prst="rect">
+            <a:avLst/>
+          </a:prstGeom>
+        </p:spPr>
+      </p:pic>
+      <p:pic>
+        <p:nvPicPr>
+          <p:cNvPr id="44" name="그림 43">
+            <a:extLst>
+              <a:ext uri="{FF2B5EF4-FFF2-40B4-BE49-F238E27FC236}">
+                <a16:creationId xmlns:a16="http://schemas.microsoft.com/office/drawing/2014/main" id="{B9AFC517-2714-452B-9688-70907AA19194}"/>
+              </a:ext>
+            </a:extLst>
+          </p:cNvPr>
+          <p:cNvPicPr>
+            <a:picLocks noChangeAspect="1"/>
+          </p:cNvPicPr>
+          <p:nvPr/>
+        </p:nvPicPr>
+        <p:blipFill>
+          <a:blip r:embed="rId9"/>
+          <a:stretch>
+            <a:fillRect/>
+          </a:stretch>
+        </p:blipFill>
+        <p:spPr>
+          <a:xfrm>
+            <a:off x="2767718" y="3257044"/>
+            <a:ext cx="6732898" cy="1333926"/>
           </a:xfrm>
           <a:prstGeom prst="rect">
             <a:avLst/>
@@ -8460,6 +8490,35 @@
           </a:p>
         </p:txBody>
       </p:sp>
+      <p:pic>
+        <p:nvPicPr>
+          <p:cNvPr id="51" name="그림 50">
+            <a:extLst>
+              <a:ext uri="{FF2B5EF4-FFF2-40B4-BE49-F238E27FC236}">
+                <a16:creationId xmlns:a16="http://schemas.microsoft.com/office/drawing/2014/main" id="{51BA1DBA-35D6-483D-BDEC-54969DE48130}"/>
+              </a:ext>
+            </a:extLst>
+          </p:cNvPr>
+          <p:cNvPicPr>
+            <a:picLocks noChangeAspect="1"/>
+          </p:cNvPicPr>
+          <p:nvPr/>
+        </p:nvPicPr>
+        <p:blipFill rotWithShape="1">
+          <a:blip r:embed="rId3"/>
+          <a:srcRect l="17518" t="44620" r="34133" b="36931"/>
+          <a:stretch/>
+        </p:blipFill>
+        <p:spPr>
+          <a:xfrm>
+            <a:off x="3372404" y="5015484"/>
+            <a:ext cx="5325271" cy="1143000"/>
+          </a:xfrm>
+          <a:prstGeom prst="rect">
+            <a:avLst/>
+          </a:prstGeom>
+        </p:spPr>
+      </p:pic>
     </p:spTree>
   </p:cSld>
   <p:clrMapOvr>
